--- a/media/resources/files/Ekvivalenettuuluk_Kaytalanuuchu_Onduktardy_Bolchokko_DalKeltiruu.pptx
+++ b/media/resources/files/Ekvivalenettuuluk_Kaytalanuuchu_Onduktardy_Bolchokko_DalKeltiruu.pptx
@@ -22115,7 +22115,7 @@
                 <a:ea typeface="+mn-ea"/>
                 <a:cs typeface="+mn-cs"/>
               </a:rPr>
-              <a:t>Турдуу пикирлер учун ыраазычылык билдиребиз.</a:t>
+              <a:t>Түрдүү пикирлер үчүн ыраазычылык билдиребиз.</a:t>
             </a:r>
           </a:p>
           <a:p>

--- a/media/resources/files/Ekvivalenettuuluk_Kaytalanuuchu_Onduktardy_Bolchokko_DalKeltiruu.pptx
+++ b/media/resources/files/Ekvivalenettuuluk_Kaytalanuuchu_Onduktardy_Bolchokko_DalKeltiruu.pptx
@@ -4272,7 +4272,7 @@
                                 <a:schemeClr val="tx1"/>
                               </a:solidFill>
                             </a:rPr>
-                            <a:t>0.6</a:t>
+                            <a:t>0,6</a:t>
                           </a:r>
                         </a:p>
                       </a:txBody>
@@ -4435,7 +4435,7 @@
                                 <a:schemeClr val="tx1"/>
                               </a:solidFill>
                             </a:rPr>
-                            <a:t>0.03</a:t>
+                            <a:t>0,03</a:t>
                           </a:r>
                         </a:p>
                       </a:txBody>
@@ -4598,7 +4598,7 @@
                                 <a:schemeClr val="tx1"/>
                               </a:solidFill>
                             </a:rPr>
-                            <a:t>0.16</a:t>
+                            <a:t>0,16</a:t>
                           </a:r>
                         </a:p>
                       </a:txBody>
@@ -4770,7 +4770,7 @@
                                 <a:schemeClr val="tx1"/>
                               </a:solidFill>
                             </a:rPr>
-                            <a:t>0.54</a:t>
+                            <a:t>0,54</a:t>
                           </a:r>
                         </a:p>
                       </a:txBody>
@@ -4933,7 +4933,7 @@
                                 <a:schemeClr val="tx1"/>
                               </a:solidFill>
                             </a:rPr>
-                            <a:t>0.72</a:t>
+                            <a:t>0,72</a:t>
                           </a:r>
                         </a:p>
                       </a:txBody>
@@ -5096,7 +5096,7 @@
                                 <a:schemeClr val="tx1"/>
                               </a:solidFill>
                             </a:rPr>
-                            <a:t>2.63</a:t>
+                            <a:t>2,63</a:t>
                           </a:r>
                         </a:p>
                       </a:txBody>
@@ -5259,7 +5259,7 @@
                                 <a:schemeClr val="tx1"/>
                               </a:solidFill>
                             </a:rPr>
-                            <a:t>0.102</a:t>
+                            <a:t>0,102</a:t>
                           </a:r>
                         </a:p>
                       </a:txBody>
@@ -5431,7 +5431,7 @@
                                 <a:schemeClr val="tx1"/>
                               </a:solidFill>
                             </a:rPr>
-                            <a:t>0.762</a:t>
+                            <a:t>0,762</a:t>
                           </a:r>
                         </a:p>
                       </a:txBody>
@@ -5594,7 +5594,7 @@
                                 <a:schemeClr val="tx1"/>
                               </a:solidFill>
                             </a:rPr>
-                            <a:t>2.750</a:t>
+                            <a:t>2,750</a:t>
                           </a:r>
                         </a:p>
                       </a:txBody>
@@ -5757,7 +5757,7 @@
                                 <a:schemeClr val="tx1"/>
                               </a:solidFill>
                             </a:rPr>
-                            <a:t>0.0423</a:t>
+                            <a:t>0,0423</a:t>
                           </a:r>
                         </a:p>
                       </a:txBody>
@@ -5972,7 +5972,7 @@
                                 <a:schemeClr val="tx1"/>
                               </a:solidFill>
                             </a:rPr>
-                            <a:t>0.6</a:t>
+                            <a:t>0,6</a:t>
                           </a:r>
                         </a:p>
                       </a:txBody>
@@ -6090,7 +6090,7 @@
                                 <a:schemeClr val="tx1"/>
                               </a:solidFill>
                             </a:rPr>
-                            <a:t>0.03</a:t>
+                            <a:t>0,03</a:t>
                           </a:r>
                         </a:p>
                       </a:txBody>
@@ -6208,7 +6208,7 @@
                                 <a:schemeClr val="tx1"/>
                               </a:solidFill>
                             </a:rPr>
-                            <a:t>0.16</a:t>
+                            <a:t>0,16</a:t>
                           </a:r>
                         </a:p>
                       </a:txBody>
@@ -6326,7 +6326,7 @@
                                 <a:schemeClr val="tx1"/>
                               </a:solidFill>
                             </a:rPr>
-                            <a:t>0.54</a:t>
+                            <a:t>0,54</a:t>
                           </a:r>
                         </a:p>
                       </a:txBody>
@@ -6444,7 +6444,7 @@
                                 <a:schemeClr val="tx1"/>
                               </a:solidFill>
                             </a:rPr>
-                            <a:t>0.72</a:t>
+                            <a:t>0,72</a:t>
                           </a:r>
                         </a:p>
                       </a:txBody>
@@ -6562,7 +6562,7 @@
                                 <a:schemeClr val="tx1"/>
                               </a:solidFill>
                             </a:rPr>
-                            <a:t>2.63</a:t>
+                            <a:t>2,63</a:t>
                           </a:r>
                         </a:p>
                       </a:txBody>
@@ -6680,7 +6680,7 @@
                                 <a:schemeClr val="tx1"/>
                               </a:solidFill>
                             </a:rPr>
-                            <a:t>0.102</a:t>
+                            <a:t>0,102</a:t>
                           </a:r>
                         </a:p>
                       </a:txBody>
@@ -6798,7 +6798,7 @@
                                 <a:schemeClr val="tx1"/>
                               </a:solidFill>
                             </a:rPr>
-                            <a:t>0.762</a:t>
+                            <a:t>0,762</a:t>
                           </a:r>
                         </a:p>
                       </a:txBody>
@@ -6916,7 +6916,7 @@
                                 <a:schemeClr val="tx1"/>
                               </a:solidFill>
                             </a:rPr>
-                            <a:t>2.750</a:t>
+                            <a:t>2,750</a:t>
                           </a:r>
                         </a:p>
                       </a:txBody>
@@ -7034,7 +7034,7 @@
                                 <a:schemeClr val="tx1"/>
                               </a:solidFill>
                             </a:rPr>
-                            <a:t>0.0423</a:t>
+                            <a:t>0,0423</a:t>
                           </a:r>
                         </a:p>
                       </a:txBody>
@@ -7796,7 +7796,7 @@
                                 <a:schemeClr val="tx1"/>
                               </a:solidFill>
                             </a:rPr>
-                            <a:t>0.6</a:t>
+                            <a:t>0,6</a:t>
                           </a:r>
                         </a:p>
                       </a:txBody>
@@ -7959,7 +7959,7 @@
                                 <a:schemeClr val="tx1"/>
                               </a:solidFill>
                             </a:rPr>
-                            <a:t>0.03</a:t>
+                            <a:t>0,03</a:t>
                           </a:r>
                         </a:p>
                       </a:txBody>
@@ -8122,7 +8122,7 @@
                                 <a:schemeClr val="tx1"/>
                               </a:solidFill>
                             </a:rPr>
-                            <a:t>0.16</a:t>
+                            <a:t>0,16</a:t>
                           </a:r>
                         </a:p>
                       </a:txBody>
@@ -8285,7 +8285,7 @@
                                 <a:schemeClr val="tx1"/>
                               </a:solidFill>
                             </a:rPr>
-                            <a:t>0.54</a:t>
+                            <a:t>0,54</a:t>
                           </a:r>
                         </a:p>
                       </a:txBody>
@@ -8448,7 +8448,7 @@
                                 <a:schemeClr val="tx1"/>
                               </a:solidFill>
                             </a:rPr>
-                            <a:t>0.72</a:t>
+                            <a:t>0,72</a:t>
                           </a:r>
                         </a:p>
                       </a:txBody>
@@ -8611,7 +8611,7 @@
                                 <a:schemeClr val="tx1"/>
                               </a:solidFill>
                             </a:rPr>
-                            <a:t>2.63</a:t>
+                            <a:t>2,63</a:t>
                           </a:r>
                         </a:p>
                       </a:txBody>
@@ -8731,7 +8731,7 @@
                                 <a:schemeClr val="tx1"/>
                               </a:solidFill>
                             </a:rPr>
-                            <a:t>0.102</a:t>
+                            <a:t>0,102</a:t>
                           </a:r>
                         </a:p>
                       </a:txBody>
@@ -8851,7 +8851,7 @@
                                 <a:schemeClr val="tx1"/>
                               </a:solidFill>
                             </a:rPr>
-                            <a:t>0.762</a:t>
+                            <a:t>0,762</a:t>
                           </a:r>
                         </a:p>
                       </a:txBody>
@@ -8971,7 +8971,7 @@
                                 <a:schemeClr val="tx1"/>
                               </a:solidFill>
                             </a:rPr>
-                            <a:t>2.750</a:t>
+                            <a:t>2,750</a:t>
                           </a:r>
                         </a:p>
                       </a:txBody>
@@ -9091,7 +9091,7 @@
                                 <a:schemeClr val="tx1"/>
                               </a:solidFill>
                             </a:rPr>
-                            <a:t>0.0423</a:t>
+                            <a:t>0,0423</a:t>
                           </a:r>
                         </a:p>
                       </a:txBody>
@@ -9263,7 +9263,7 @@
                                 <a:schemeClr val="tx1"/>
                               </a:solidFill>
                             </a:rPr>
-                            <a:t>0.6</a:t>
+                            <a:t>0,6</a:t>
                           </a:r>
                         </a:p>
                       </a:txBody>
@@ -9381,7 +9381,7 @@
                                 <a:schemeClr val="tx1"/>
                               </a:solidFill>
                             </a:rPr>
-                            <a:t>0.03</a:t>
+                            <a:t>0,03</a:t>
                           </a:r>
                         </a:p>
                       </a:txBody>
@@ -9499,7 +9499,7 @@
                                 <a:schemeClr val="tx1"/>
                               </a:solidFill>
                             </a:rPr>
-                            <a:t>0.16</a:t>
+                            <a:t>0,16</a:t>
                           </a:r>
                         </a:p>
                       </a:txBody>
@@ -9617,7 +9617,7 @@
                                 <a:schemeClr val="tx1"/>
                               </a:solidFill>
                             </a:rPr>
-                            <a:t>0.54</a:t>
+                            <a:t>0,54</a:t>
                           </a:r>
                         </a:p>
                       </a:txBody>
@@ -9735,7 +9735,7 @@
                                 <a:schemeClr val="tx1"/>
                               </a:solidFill>
                             </a:rPr>
-                            <a:t>0.72</a:t>
+                            <a:t>0,72</a:t>
                           </a:r>
                         </a:p>
                       </a:txBody>
@@ -9853,7 +9853,7 @@
                                 <a:schemeClr val="tx1"/>
                               </a:solidFill>
                             </a:rPr>
-                            <a:t>2.63</a:t>
+                            <a:t>2,63</a:t>
                           </a:r>
                         </a:p>
                       </a:txBody>
@@ -9973,7 +9973,7 @@
                                 <a:schemeClr val="tx1"/>
                               </a:solidFill>
                             </a:rPr>
-                            <a:t>0.102</a:t>
+                            <a:t>0,102</a:t>
                           </a:r>
                         </a:p>
                       </a:txBody>
@@ -10093,7 +10093,7 @@
                                 <a:schemeClr val="tx1"/>
                               </a:solidFill>
                             </a:rPr>
-                            <a:t>0.762</a:t>
+                            <a:t>0,762</a:t>
                           </a:r>
                         </a:p>
                       </a:txBody>
@@ -10213,7 +10213,7 @@
                                 <a:schemeClr val="tx1"/>
                               </a:solidFill>
                             </a:rPr>
-                            <a:t>2.750</a:t>
+                            <a:t>2,750</a:t>
                           </a:r>
                         </a:p>
                       </a:txBody>
@@ -10333,7 +10333,7 @@
                                 <a:schemeClr val="tx1"/>
                               </a:solidFill>
                             </a:rPr>
-                            <a:t>0.0423</a:t>
+                            <a:t>0,0423</a:t>
                           </a:r>
                         </a:p>
                       </a:txBody>
@@ -11187,7 +11187,7 @@
                                 <a:schemeClr val="tx1"/>
                               </a:solidFill>
                             </a:rPr>
-                            <a:t>0.6</a:t>
+                            <a:t>0,6</a:t>
                           </a:r>
                         </a:p>
                       </a:txBody>
@@ -11350,7 +11350,7 @@
                                 <a:schemeClr val="tx1"/>
                               </a:solidFill>
                             </a:rPr>
-                            <a:t>0.03</a:t>
+                            <a:t>0,03</a:t>
                           </a:r>
                         </a:p>
                       </a:txBody>
@@ -11513,7 +11513,7 @@
                                 <a:schemeClr val="tx1"/>
                               </a:solidFill>
                             </a:rPr>
-                            <a:t>0.16</a:t>
+                            <a:t>0,16</a:t>
                           </a:r>
                         </a:p>
                       </a:txBody>
@@ -11676,7 +11676,7 @@
                                 <a:schemeClr val="tx1"/>
                               </a:solidFill>
                             </a:rPr>
-                            <a:t>0.54</a:t>
+                            <a:t>0,54</a:t>
                           </a:r>
                         </a:p>
                       </a:txBody>
@@ -11839,7 +11839,7 @@
                                 <a:schemeClr val="tx1"/>
                               </a:solidFill>
                             </a:rPr>
-                            <a:t>0.72</a:t>
+                            <a:t>0,72</a:t>
                           </a:r>
                         </a:p>
                       </a:txBody>
@@ -12002,7 +12002,7 @@
                                 <a:schemeClr val="tx1"/>
                               </a:solidFill>
                             </a:rPr>
-                            <a:t>2.63</a:t>
+                            <a:t>2,63</a:t>
                           </a:r>
                         </a:p>
                       </a:txBody>
@@ -12174,7 +12174,7 @@
                                 <a:schemeClr val="tx1"/>
                               </a:solidFill>
                             </a:rPr>
-                            <a:t>0.102</a:t>
+                            <a:t>0,102</a:t>
                           </a:r>
                         </a:p>
                       </a:txBody>
@@ -12337,7 +12337,7 @@
                                 <a:schemeClr val="tx1"/>
                               </a:solidFill>
                             </a:rPr>
-                            <a:t>0.762</a:t>
+                            <a:t>0,762</a:t>
                           </a:r>
                         </a:p>
                       </a:txBody>
@@ -12500,7 +12500,7 @@
                                 <a:schemeClr val="tx1"/>
                               </a:solidFill>
                             </a:rPr>
-                            <a:t>2.750</a:t>
+                            <a:t>2,750</a:t>
                           </a:r>
                         </a:p>
                       </a:txBody>
@@ -12672,7 +12672,7 @@
                                 <a:schemeClr val="tx1"/>
                               </a:solidFill>
                             </a:rPr>
-                            <a:t>0.0423</a:t>
+                            <a:t>0,0423</a:t>
                           </a:r>
                         </a:p>
                       </a:txBody>
@@ -12881,7 +12881,7 @@
                                 <a:schemeClr val="tx1"/>
                               </a:solidFill>
                             </a:rPr>
-                            <a:t>0.6</a:t>
+                            <a:t>0,6</a:t>
                           </a:r>
                         </a:p>
                       </a:txBody>
@@ -12999,7 +12999,7 @@
                                 <a:schemeClr val="tx1"/>
                               </a:solidFill>
                             </a:rPr>
-                            <a:t>0.03</a:t>
+                            <a:t>0,03</a:t>
                           </a:r>
                         </a:p>
                       </a:txBody>
@@ -13117,7 +13117,7 @@
                                 <a:schemeClr val="tx1"/>
                               </a:solidFill>
                             </a:rPr>
-                            <a:t>0.16</a:t>
+                            <a:t>0,16</a:t>
                           </a:r>
                         </a:p>
                       </a:txBody>
@@ -13235,7 +13235,7 @@
                                 <a:schemeClr val="tx1"/>
                               </a:solidFill>
                             </a:rPr>
-                            <a:t>0.54</a:t>
+                            <a:t>0,54</a:t>
                           </a:r>
                         </a:p>
                       </a:txBody>
@@ -13353,7 +13353,7 @@
                                 <a:schemeClr val="tx1"/>
                               </a:solidFill>
                             </a:rPr>
-                            <a:t>0.72</a:t>
+                            <a:t>0,72</a:t>
                           </a:r>
                         </a:p>
                       </a:txBody>
@@ -13471,7 +13471,7 @@
                                 <a:schemeClr val="tx1"/>
                               </a:solidFill>
                             </a:rPr>
-                            <a:t>2.63</a:t>
+                            <a:t>2,63</a:t>
                           </a:r>
                         </a:p>
                       </a:txBody>
@@ -13589,7 +13589,7 @@
                                 <a:schemeClr val="tx1"/>
                               </a:solidFill>
                             </a:rPr>
-                            <a:t>0.102</a:t>
+                            <a:t>0,102</a:t>
                           </a:r>
                         </a:p>
                       </a:txBody>
@@ -13707,7 +13707,7 @@
                                 <a:schemeClr val="tx1"/>
                               </a:solidFill>
                             </a:rPr>
-                            <a:t>0.762</a:t>
+                            <a:t>0,762</a:t>
                           </a:r>
                         </a:p>
                       </a:txBody>
@@ -13825,7 +13825,7 @@
                                 <a:schemeClr val="tx1"/>
                               </a:solidFill>
                             </a:rPr>
-                            <a:t>2.750</a:t>
+                            <a:t>2,750</a:t>
                           </a:r>
                         </a:p>
                       </a:txBody>
@@ -13943,7 +13943,7 @@
                                 <a:schemeClr val="tx1"/>
                               </a:solidFill>
                             </a:rPr>
-                            <a:t>0.0423</a:t>
+                            <a:t>0,0423</a:t>
                           </a:r>
                         </a:p>
                       </a:txBody>
@@ -14801,7 +14801,7 @@
                                 <a:schemeClr val="tx1"/>
                               </a:solidFill>
                             </a:rPr>
-                            <a:t>0.6</a:t>
+                            <a:t>0,6</a:t>
                           </a:r>
                         </a:p>
                       </a:txBody>
@@ -14964,7 +14964,7 @@
                                 <a:schemeClr val="tx1"/>
                               </a:solidFill>
                             </a:rPr>
-                            <a:t>0.03</a:t>
+                            <a:t>0,03</a:t>
                           </a:r>
                         </a:p>
                       </a:txBody>
@@ -15127,7 +15127,7 @@
                                 <a:schemeClr val="tx1"/>
                               </a:solidFill>
                             </a:rPr>
-                            <a:t>0.16</a:t>
+                            <a:t>0,16</a:t>
                           </a:r>
                         </a:p>
                       </a:txBody>
@@ -15299,7 +15299,7 @@
                                 <a:schemeClr val="tx1"/>
                               </a:solidFill>
                             </a:rPr>
-                            <a:t>0.54</a:t>
+                            <a:t>0,54</a:t>
                           </a:r>
                         </a:p>
                       </a:txBody>
@@ -15462,7 +15462,7 @@
                                 <a:schemeClr val="tx1"/>
                               </a:solidFill>
                             </a:rPr>
-                            <a:t>0.72</a:t>
+                            <a:t>0,72</a:t>
                           </a:r>
                         </a:p>
                       </a:txBody>
@@ -15625,7 +15625,7 @@
                                 <a:schemeClr val="tx1"/>
                               </a:solidFill>
                             </a:rPr>
-                            <a:t>2.63</a:t>
+                            <a:t>2,63</a:t>
                           </a:r>
                         </a:p>
                       </a:txBody>
@@ -15788,7 +15788,7 @@
                                 <a:schemeClr val="tx1"/>
                               </a:solidFill>
                             </a:rPr>
-                            <a:t>0.102</a:t>
+                            <a:t>0,102</a:t>
                           </a:r>
                         </a:p>
                       </a:txBody>
@@ -15960,7 +15960,7 @@
                                 <a:schemeClr val="tx1"/>
                               </a:solidFill>
                             </a:rPr>
-                            <a:t>0.762</a:t>
+                            <a:t>0,762</a:t>
                           </a:r>
                         </a:p>
                       </a:txBody>
@@ -16123,7 +16123,7 @@
                                 <a:schemeClr val="tx1"/>
                               </a:solidFill>
                             </a:rPr>
-                            <a:t>2.750</a:t>
+                            <a:t>2,750</a:t>
                           </a:r>
                         </a:p>
                       </a:txBody>
@@ -16286,7 +16286,7 @@
                                 <a:schemeClr val="tx1"/>
                               </a:solidFill>
                             </a:rPr>
-                            <a:t>0.0423</a:t>
+                            <a:t>0,0423</a:t>
                           </a:r>
                         </a:p>
                       </a:txBody>
@@ -16501,7 +16501,7 @@
                                 <a:schemeClr val="tx1"/>
                               </a:solidFill>
                             </a:rPr>
-                            <a:t>0.6</a:t>
+                            <a:t>0,6</a:t>
                           </a:r>
                         </a:p>
                       </a:txBody>
@@ -16619,7 +16619,7 @@
                                 <a:schemeClr val="tx1"/>
                               </a:solidFill>
                             </a:rPr>
-                            <a:t>0.03</a:t>
+                            <a:t>0,03</a:t>
                           </a:r>
                         </a:p>
                       </a:txBody>
@@ -16737,7 +16737,7 @@
                                 <a:schemeClr val="tx1"/>
                               </a:solidFill>
                             </a:rPr>
-                            <a:t>0.16</a:t>
+                            <a:t>0,16</a:t>
                           </a:r>
                         </a:p>
                       </a:txBody>
@@ -16855,7 +16855,7 @@
                                 <a:schemeClr val="tx1"/>
                               </a:solidFill>
                             </a:rPr>
-                            <a:t>0.54</a:t>
+                            <a:t>0,54</a:t>
                           </a:r>
                         </a:p>
                       </a:txBody>
@@ -16973,7 +16973,7 @@
                                 <a:schemeClr val="tx1"/>
                               </a:solidFill>
                             </a:rPr>
-                            <a:t>0.72</a:t>
+                            <a:t>0,72</a:t>
                           </a:r>
                         </a:p>
                       </a:txBody>
@@ -17091,7 +17091,7 @@
                                 <a:schemeClr val="tx1"/>
                               </a:solidFill>
                             </a:rPr>
-                            <a:t>2.63</a:t>
+                            <a:t>2,63</a:t>
                           </a:r>
                         </a:p>
                       </a:txBody>
@@ -17209,7 +17209,7 @@
                                 <a:schemeClr val="tx1"/>
                               </a:solidFill>
                             </a:rPr>
-                            <a:t>0.102</a:t>
+                            <a:t>0,102</a:t>
                           </a:r>
                         </a:p>
                       </a:txBody>
@@ -17327,7 +17327,7 @@
                                 <a:schemeClr val="tx1"/>
                               </a:solidFill>
                             </a:rPr>
-                            <a:t>0.762</a:t>
+                            <a:t>0,762</a:t>
                           </a:r>
                         </a:p>
                       </a:txBody>
@@ -17445,7 +17445,7 @@
                                 <a:schemeClr val="tx1"/>
                               </a:solidFill>
                             </a:rPr>
-                            <a:t>2.750</a:t>
+                            <a:t>2,750</a:t>
                           </a:r>
                         </a:p>
                       </a:txBody>
@@ -17563,7 +17563,7 @@
                                 <a:schemeClr val="tx1"/>
                               </a:solidFill>
                             </a:rPr>
-                            <a:t>0.0423</a:t>
+                            <a:t>0,0423</a:t>
                           </a:r>
                         </a:p>
                       </a:txBody>
@@ -18295,7 +18295,7 @@
                                 <a:schemeClr val="tx1"/>
                               </a:solidFill>
                             </a:rPr>
-                            <a:t>0.6</a:t>
+                            <a:t>0,6</a:t>
                           </a:r>
                         </a:p>
                       </a:txBody>
@@ -18458,7 +18458,7 @@
                                 <a:schemeClr val="tx1"/>
                               </a:solidFill>
                             </a:rPr>
-                            <a:t>0.03</a:t>
+                            <a:t>0,03</a:t>
                           </a:r>
                         </a:p>
                       </a:txBody>
@@ -18621,7 +18621,7 @@
                                 <a:schemeClr val="tx1"/>
                               </a:solidFill>
                             </a:rPr>
-                            <a:t>0.16</a:t>
+                            <a:t>0,16</a:t>
                           </a:r>
                         </a:p>
                       </a:txBody>
@@ -18793,7 +18793,7 @@
                                 <a:schemeClr val="tx1"/>
                               </a:solidFill>
                             </a:rPr>
-                            <a:t>0.54</a:t>
+                            <a:t>0,54</a:t>
                           </a:r>
                         </a:p>
                       </a:txBody>
@@ -18956,7 +18956,7 @@
                                 <a:schemeClr val="tx1"/>
                               </a:solidFill>
                             </a:rPr>
-                            <a:t>0.72</a:t>
+                            <a:t>0,72</a:t>
                           </a:r>
                         </a:p>
                       </a:txBody>
@@ -19119,7 +19119,7 @@
                                 <a:schemeClr val="tx1"/>
                               </a:solidFill>
                             </a:rPr>
-                            <a:t>2.63</a:t>
+                            <a:t>2,63</a:t>
                           </a:r>
                         </a:p>
                       </a:txBody>
@@ -19282,7 +19282,7 @@
                                 <a:schemeClr val="tx1"/>
                               </a:solidFill>
                             </a:rPr>
-                            <a:t>0.102</a:t>
+                            <a:t>0,102</a:t>
                           </a:r>
                         </a:p>
                       </a:txBody>
@@ -19454,7 +19454,7 @@
                                 <a:schemeClr val="tx1"/>
                               </a:solidFill>
                             </a:rPr>
-                            <a:t>0.762</a:t>
+                            <a:t>0,762</a:t>
                           </a:r>
                         </a:p>
                       </a:txBody>
@@ -19617,7 +19617,7 @@
                                 <a:schemeClr val="tx1"/>
                               </a:solidFill>
                             </a:rPr>
-                            <a:t>2.750</a:t>
+                            <a:t>2,750</a:t>
                           </a:r>
                         </a:p>
                       </a:txBody>
@@ -19780,7 +19780,7 @@
                                 <a:schemeClr val="tx1"/>
                               </a:solidFill>
                             </a:rPr>
-                            <a:t>0.0423</a:t>
+                            <a:t>0,0423</a:t>
                           </a:r>
                         </a:p>
                       </a:txBody>
@@ -19995,7 +19995,7 @@
                                 <a:schemeClr val="tx1"/>
                               </a:solidFill>
                             </a:rPr>
-                            <a:t>0.6</a:t>
+                            <a:t>0,6</a:t>
                           </a:r>
                         </a:p>
                       </a:txBody>
@@ -20113,7 +20113,7 @@
                                 <a:schemeClr val="tx1"/>
                               </a:solidFill>
                             </a:rPr>
-                            <a:t>0.03</a:t>
+                            <a:t>0,03</a:t>
                           </a:r>
                         </a:p>
                       </a:txBody>
@@ -20231,7 +20231,7 @@
                                 <a:schemeClr val="tx1"/>
                               </a:solidFill>
                             </a:rPr>
-                            <a:t>0.16</a:t>
+                            <a:t>0,16</a:t>
                           </a:r>
                         </a:p>
                       </a:txBody>
@@ -20349,7 +20349,7 @@
                                 <a:schemeClr val="tx1"/>
                               </a:solidFill>
                             </a:rPr>
-                            <a:t>0.54</a:t>
+                            <a:t>0,54</a:t>
                           </a:r>
                         </a:p>
                       </a:txBody>
@@ -20467,7 +20467,7 @@
                                 <a:schemeClr val="tx1"/>
                               </a:solidFill>
                             </a:rPr>
-                            <a:t>0.72</a:t>
+                            <a:t>0,72</a:t>
                           </a:r>
                         </a:p>
                       </a:txBody>
@@ -20585,7 +20585,7 @@
                                 <a:schemeClr val="tx1"/>
                               </a:solidFill>
                             </a:rPr>
-                            <a:t>2.63</a:t>
+                            <a:t>2,63</a:t>
                           </a:r>
                         </a:p>
                       </a:txBody>
@@ -20703,7 +20703,7 @@
                                 <a:schemeClr val="tx1"/>
                               </a:solidFill>
                             </a:rPr>
-                            <a:t>0.102</a:t>
+                            <a:t>0,102</a:t>
                           </a:r>
                         </a:p>
                       </a:txBody>
@@ -20821,7 +20821,7 @@
                                 <a:schemeClr val="tx1"/>
                               </a:solidFill>
                             </a:rPr>
-                            <a:t>0.762</a:t>
+                            <a:t>0,762</a:t>
                           </a:r>
                         </a:p>
                       </a:txBody>
@@ -20939,7 +20939,7 @@
                                 <a:schemeClr val="tx1"/>
                               </a:solidFill>
                             </a:rPr>
-                            <a:t>2.750</a:t>
+                            <a:t>2,750</a:t>
                           </a:r>
                         </a:p>
                       </a:txBody>
@@ -21057,7 +21057,7 @@
                                 <a:schemeClr val="tx1"/>
                               </a:solidFill>
                             </a:rPr>
-                            <a:t>0.0423</a:t>
+                            <a:t>0,0423</a:t>
                           </a:r>
                         </a:p>
                       </a:txBody>
